--- a/presentation/HealthConnect Data Analytics — Week 8 Final Presentation.pptx
+++ b/presentation/HealthConnect Data Analytics — Week 8 Final Presentation.pptx
@@ -4627,7 +4627,7 @@
                 <a:ea typeface="Arial" pitchFamily="34" charset="-122"/>
                 <a:cs typeface="Arial" pitchFamily="34" charset="-120"/>
               </a:rPr>
-              <a:t>Data Science: lead time &amp; prior no-shows confirmed as top predictive features, plus a candidate risk-segment flag</a:t>
+              <a:t>Project Management: the validated drivers and the 1,529-appointment risk segment sized for staffing and confirmation-call planning</a:t>
             </a:r>
             <a:endParaRPr lang="en-US" sz="1200" dirty="0"/>
           </a:p>
@@ -4648,7 +4648,7 @@
                 <a:ea typeface="Arial" pitchFamily="34" charset="-122"/>
                 <a:cs typeface="Arial" pitchFamily="34" charset="-120"/>
               </a:rPr>
-              <a:t>Project Management: the 1,529-appointment segment sized for staffing and confirmation-call planning</a:t>
+              <a:t>PM's integration register logged the exchange and carried it into Week 7-8 planning</a:t>
             </a:r>
             <a:endParaRPr lang="en-US" sz="1200" dirty="0"/>
           </a:p>
